--- a/reference/PASCUCCI_분석리포트_샘플_v2.6.pptx
+++ b/reference/PASCUCCI_분석리포트_샘플_v2.6.pptx
@@ -4268,7 +4268,7 @@
                 <a:ea typeface="맑은 고딕" panose="020B0503020000020004" pitchFamily="34" charset="-127"/>
                 <a:cs typeface="맑은 고딕" pitchFamily="34" charset="-120"/>
               </a:rPr>
-              <a:t>v2.6.0(beta)</a:t>
+              <a:t>v2.6.1(beta)</a:t>
             </a:r>
             <a:endParaRPr lang="en-US" sz="934" dirty="0">
               <a:latin typeface="Malgun Gothic" panose="020B0503020000020004" pitchFamily="34" charset="-127"/>
@@ -5720,7 +5720,7 @@
       </p:sp>
       <p:pic>
         <p:nvPicPr>
-          <p:cNvPr id="6" name="Picture 5" descr="tmpcy3uld6i.png"/>
+          <p:cNvPr id="6" name="Picture 5" descr="tmpalhm7z5x.png"/>
           <p:cNvPicPr>
             <a:picLocks noChangeAspect="1"/>
           </p:cNvPicPr>
@@ -6312,7 +6312,7 @@
       </p:sp>
       <p:pic>
         <p:nvPicPr>
-          <p:cNvPr id="6" name="Picture 5" descr="tmpfexampwy.png"/>
+          <p:cNvPr id="6" name="Picture 5" descr="tmp3cxgmhgf.png"/>
           <p:cNvPicPr>
             <a:picLocks noChangeAspect="1"/>
           </p:cNvPicPr>
@@ -10717,7 +10717,7 @@
       </p:sp>
       <p:pic>
         <p:nvPicPr>
-          <p:cNvPr id="6" name="Picture 5" descr="tmpp9feuwvx.png"/>
+          <p:cNvPr id="6" name="Picture 5" descr="tmpm_n08z1t.png"/>
           <p:cNvPicPr>
             <a:picLocks noChangeAspect="1"/>
           </p:cNvPicPr>
@@ -17122,7 +17122,7 @@
       </p:sp>
       <p:pic>
         <p:nvPicPr>
-          <p:cNvPr id="6" name="Picture 5" descr="tmp7ovfi0mi.png"/>
+          <p:cNvPr id="6" name="Picture 5" descr="tmpw8wp8pt9.png"/>
           <p:cNvPicPr>
             <a:picLocks noChangeAspect="1"/>
           </p:cNvPicPr>
@@ -17758,7 +17758,7 @@
       </p:sp>
       <p:pic>
         <p:nvPicPr>
-          <p:cNvPr id="6" name="Picture 5" descr="tmp3b9uaztx.png"/>
+          <p:cNvPr id="6" name="Picture 5" descr="tmpdwi26b72.png"/>
           <p:cNvPicPr>
             <a:picLocks noChangeAspect="1"/>
           </p:cNvPicPr>
@@ -18361,7 +18361,7 @@
       </p:sp>
       <p:pic>
         <p:nvPicPr>
-          <p:cNvPr id="6" name="Picture 5" descr="tmpvmv558mx.png"/>
+          <p:cNvPr id="6" name="Picture 5" descr="tmpugli9yv2.png"/>
           <p:cNvPicPr>
             <a:picLocks noChangeAspect="1"/>
           </p:cNvPicPr>
